--- a/AI_Resume_Job_Matcher_Presentation.pptx
+++ b/AI_Resume_Job_Matcher_Presentation.pptx
@@ -3152,50 +3152,7 @@
       </p:sp>
       <p:sp>
         <p:nvSpPr>
-          <p:cNvPr id="3" name="Rectangle 2"/>
-          <p:cNvSpPr/>
-          <p:nvPr/>
-        </p:nvSpPr>
-        <p:spPr>
-          <a:xfrm>
-            <a:off x="0" y="54864"/>
-            <a:ext cx="12188952" cy="6803136"/>
-          </a:xfrm>
-          <a:prstGeom prst="rect">
-            <a:avLst/>
-          </a:prstGeom>
-          <a:solidFill>
-            <a:srgbClr val="1E1E2E"/>
-          </a:solidFill>
-          <a:ln>
-            <a:noFill/>
-          </a:ln>
-        </p:spPr>
-        <p:style>
-          <a:lnRef idx="1">
-            <a:schemeClr val="accent1"/>
-          </a:lnRef>
-          <a:fillRef idx="3">
-            <a:schemeClr val="accent1"/>
-          </a:fillRef>
-          <a:effectRef idx="2">
-            <a:schemeClr val="accent1"/>
-          </a:effectRef>
-          <a:fontRef idx="minor">
-            <a:schemeClr val="lt1"/>
-          </a:fontRef>
-        </p:style>
-        <p:txBody>
-          <a:bodyPr rtlCol="0" anchor="ctr"/>
-          <a:lstStyle/>
-          <a:p>
-            <a:pPr algn="ctr"/>
-          </a:p>
-        </p:txBody>
-      </p:sp>
-      <p:sp>
-        <p:nvSpPr>
-          <p:cNvPr id="4" name="TextBox 3"/>
+          <p:cNvPr id="3" name="TextBox 2"/>
           <p:cNvSpPr txBox="1"/>
           <p:nvPr/>
         </p:nvSpPr>
@@ -3229,7 +3186,7 @@
       </p:sp>
       <p:sp>
         <p:nvSpPr>
-          <p:cNvPr id="5" name="TextBox 4"/>
+          <p:cNvPr id="4" name="TextBox 3"/>
           <p:cNvSpPr txBox="1"/>
           <p:nvPr/>
         </p:nvSpPr>
@@ -3263,7 +3220,7 @@
       </p:sp>
       <p:sp>
         <p:nvSpPr>
-          <p:cNvPr id="6" name="TextBox 5"/>
+          <p:cNvPr id="5" name="TextBox 4"/>
           <p:cNvSpPr txBox="1"/>
           <p:nvPr/>
         </p:nvSpPr>
@@ -3290,14 +3247,14 @@
                   <a:srgbClr val="FFFFFF"/>
                 </a:solidFill>
               </a:rPr>
-              <a:t>Sieme Gilis</a:t>
-            </a:r>
-          </a:p>
-        </p:txBody>
-      </p:sp>
-      <p:sp>
-        <p:nvSpPr>
-          <p:cNvPr id="7" name="Rectangle 6"/>
+              <a:t>Sieme Ngilis</a:t>
+            </a:r>
+          </a:p>
+        </p:txBody>
+      </p:sp>
+      <p:sp>
+        <p:nvSpPr>
+          <p:cNvPr id="6" name="Rectangle 5"/>
           <p:cNvSpPr/>
           <p:nvPr/>
         </p:nvSpPr>
@@ -3340,7 +3297,7 @@
       </p:sp>
       <p:sp>
         <p:nvSpPr>
-          <p:cNvPr id="8" name="TextBox 7"/>
+          <p:cNvPr id="7" name="TextBox 6"/>
           <p:cNvSpPr txBox="1"/>
           <p:nvPr/>
         </p:nvSpPr>
@@ -3367,7 +3324,7 @@
                   <a:srgbClr val="CCCCCC"/>
                 </a:solidFill>
               </a:rPr>
-              <a:t>github.com/siemgls/ai-resume-job-matcher</a:t>
+              <a:t>Semantic similarity · Skill extraction · GPT feedback · Automated ranking</a:t>
             </a:r>
           </a:p>
         </p:txBody>
@@ -3662,7 +3619,7 @@
                   <a:srgbClr val="FFFFFF"/>
                 </a:solidFill>
               </a:rPr>
-              <a:t>  Fine-tuning clearly improved accuracy (0.83 → 0.90)</a:t>
+              <a:t>  Fine-tuning improved accuracy vs base model</a:t>
             </a:r>
           </a:p>
           <a:p>
@@ -3722,7 +3679,7 @@
                   <a:srgbClr val="FFFFFF"/>
                 </a:solidFill>
               </a:rPr>
-              <a:t>  Streamlit state management for multi-page flow</a:t>
+              <a:t>  Streamlit session_state for multi-page flow</a:t>
             </a:r>
           </a:p>
           <a:p>
@@ -3867,7 +3824,7 @@
                   <a:srgbClr val="FFFFFF"/>
                 </a:solidFill>
               </a:rPr>
-              <a:t>  Dataset only covers developer roles — no cybersecurity, design, business jobs</a:t>
+              <a:t>  Dataset only covers developer roles — no cybersecurity, design, or business jobs</a:t>
             </a:r>
           </a:p>
           <a:p>
@@ -5100,7 +5057,7 @@
                   <a:srgbClr val="FFFFFF"/>
                 </a:solidFill>
               </a:rPr>
-              <a:t>This project goes beyond a simple keyword matcher. By combining fine-tuned transformer embeddings, multi-signal scoring, and GPT-powered feedback, it delivers a genuinely useful career tool. The 0.89 accuracy and 100% ranking accuracy on evaluation confirm the system works — and the Streamlit app makes it accessible to anyone.</a:t>
+              <a:t>This project goes beyond a simple keyword matcher. By combining fine-tuned transformer embeddings, multi-signal scoring, and GPT-powered feedback, it delivers a genuinely useful career tool. The 90% accuracy and 100% ranking accuracy on a held-out test set confirm the system works — and the Streamlit app makes it accessible to anyone.</a:t>
             </a:r>
           </a:p>
         </p:txBody>
@@ -5533,7 +5490,7 @@
                   <a:srgbClr val="FFFFFF"/>
                 </a:solidFill>
               </a:rPr>
-              <a:t>  Skill gap analysis &amp; personalized feedback</a:t>
+              <a:t>  Skill gap analysis &amp; personalised feedback</a:t>
             </a:r>
           </a:p>
           <a:p>
@@ -6806,7 +6763,7 @@
         <p:spPr>
           <a:xfrm>
             <a:off x="457200" y="1280160"/>
-            <a:ext cx="5303520" cy="2377440"/>
+            <a:ext cx="5303520" cy="2468880"/>
           </a:xfrm>
           <a:prstGeom prst="rect">
             <a:avLst/>
@@ -6883,7 +6840,7 @@
         <p:spPr>
           <a:xfrm>
             <a:off x="548640" y="1828800"/>
-            <a:ext cx="5029200" cy="1920240"/>
+            <a:ext cx="5029200" cy="2011680"/>
           </a:xfrm>
           <a:prstGeom prst="rect">
             <a:avLst/>
@@ -6952,7 +6909,7 @@
                   <a:srgbClr val="FFFFFF"/>
                 </a:solidFill>
               </a:rPr>
-              <a:t>  644 matches / 377 non-matches</a:t>
+              <a:t>  80/20 stratified split  →  816 train / 205 test</a:t>
             </a:r>
           </a:p>
           <a:p>
@@ -6981,7 +6938,7 @@
         <p:spPr>
           <a:xfrm>
             <a:off x="6309360" y="1280160"/>
-            <a:ext cx="5303520" cy="2377440"/>
+            <a:ext cx="5303520" cy="2468880"/>
           </a:xfrm>
           <a:prstGeom prst="rect">
             <a:avLst/>
@@ -7058,7 +7015,7 @@
         <p:spPr>
           <a:xfrm>
             <a:off x="6400800" y="1828800"/>
-            <a:ext cx="5029200" cy="1920240"/>
+            <a:ext cx="5029200" cy="2011680"/>
           </a:xfrm>
           <a:prstGeom prst="rect">
             <a:avLst/>
@@ -7155,7 +7112,7 @@
         </p:nvSpPr>
         <p:spPr>
           <a:xfrm>
-            <a:off x="457200" y="3840480"/>
+            <a:off x="457200" y="3931920"/>
             <a:ext cx="10972800" cy="365760"/>
           </a:xfrm>
           <a:prstGeom prst="rect">
@@ -7189,8 +7146,8 @@
         </p:nvSpPr>
         <p:spPr>
           <a:xfrm>
-            <a:off x="457200" y="4251960"/>
-            <a:ext cx="11247120" cy="1188720"/>
+            <a:off x="457200" y="4343400"/>
+            <a:ext cx="11247120" cy="1005840"/>
           </a:xfrm>
           <a:prstGeom prst="rect">
             <a:avLst/>
@@ -7242,7 +7199,7 @@
         </p:nvSpPr>
         <p:spPr>
           <a:xfrm>
-            <a:off x="457200" y="5577840"/>
+            <a:off x="457200" y="5486400"/>
             <a:ext cx="11274552" cy="822960"/>
           </a:xfrm>
           <a:prstGeom prst="rect">
@@ -7285,7 +7242,7 @@
         </p:nvSpPr>
         <p:spPr>
           <a:xfrm>
-            <a:off x="640080" y="5669280"/>
+            <a:off x="640080" y="5577840"/>
             <a:ext cx="10972800" cy="640080"/>
           </a:xfrm>
           <a:prstGeom prst="rect">
@@ -7573,7 +7530,7 @@
                   <a:srgbClr val="FFFFFF"/>
                 </a:solidFill>
               </a:rPr>
-              <a:t>  Fine-tuned on 1,021 labeled pairs using CosineSimilarityLoss</a:t>
+              <a:t>  Fine-tuned on 816 labeled pairs using CosineSimilarityLoss</a:t>
             </a:r>
           </a:p>
           <a:p>
@@ -8206,7 +8163,7 @@
                   <a:srgbClr val="FFFFFF"/>
                 </a:solidFill>
               </a:rPr>
-              <a:t>  Input: (resume, job_description) pairs with similarity label (0 or 1)</a:t>
+              <a:t>  80/20 stratified split — trained on 816 pairs, evaluated on held-out 205</a:t>
             </a:r>
           </a:p>
         </p:txBody>
@@ -8240,7 +8197,7 @@
                   <a:srgbClr val="F9E2AF"/>
                 </a:solidFill>
               </a:rPr>
-              <a:t>Results</a:t>
+              <a:t>Results (on held-out test set)</a:t>
             </a:r>
           </a:p>
         </p:txBody>
@@ -8351,7 +8308,7 @@
                   <a:srgbClr val="F38BA8"/>
                 </a:solidFill>
               </a:rPr>
-              <a:t>Before:  0.83</a:t>
+              <a:t>Before:  ~0.83</a:t>
             </a:r>
           </a:p>
         </p:txBody>
@@ -8496,7 +8453,7 @@
                   <a:srgbClr val="F38BA8"/>
                 </a:solidFill>
               </a:rPr>
-              <a:t>Before:  0.80</a:t>
+              <a:t>Before:  ~0.80</a:t>
             </a:r>
           </a:p>
         </p:txBody>
@@ -9114,7 +9071,7 @@
                 </a:solidFill>
               </a:rPr>
               <a:t>GPT rewrites the full resume text incorporating all suggestions.
-Downloadable as a new PDF — original file is never modified.</a:t>
+Downloadable as a new styled PDF — original file is never modified.</a:t>
             </a:r>
           </a:p>
         </p:txBody>
@@ -9784,7 +9741,7 @@
                   <a:srgbClr val="F9E2AF"/>
                 </a:solidFill>
               </a:rPr>
-              <a:t>Mode 2 — Auto Match</a:t>
+              <a:t>Mode 2 — Auto Match (default)</a:t>
             </a:r>
           </a:p>
         </p:txBody>
@@ -9867,7 +9824,7 @@
                   <a:srgbClr val="FFFFFF"/>
                 </a:solidFill>
               </a:rPr>
-              <a:t>  Results on dedicated page</a:t>
+              <a:t>  Results on a dedicated results page</a:t>
             </a:r>
           </a:p>
           <a:p>
@@ -9882,7 +9839,7 @@
                   <a:srgbClr val="FFFFFF"/>
                 </a:solidFill>
               </a:rPr>
-              <a:t>  Dropdown to switch between top 10 matches</a:t>
+              <a:t>  Job selector dropdown for top 10</a:t>
             </a:r>
           </a:p>
           <a:p>
@@ -9931,7 +9888,7 @@
                   <a:srgbClr val="74C7EC"/>
                 </a:solidFill>
               </a:rPr>
-              <a:t>Other features:</a:t>
+              <a:t>Additional UX features:</a:t>
             </a:r>
           </a:p>
         </p:txBody>
@@ -9945,7 +9902,7 @@
         <p:spPr>
           <a:xfrm>
             <a:off x="457200" y="5394960"/>
-            <a:ext cx="11247120" cy="1097280"/>
+            <a:ext cx="11247120" cy="822960"/>
           </a:xfrm>
           <a:prstGeom prst="rect">
             <a:avLst/>
@@ -9969,7 +9926,7 @@
                   <a:srgbClr val="FFFFFF"/>
                 </a:solidFill>
               </a:rPr>
-              <a:t>  PDF preview of uploaded resume   •   Apply improvements &amp; download updated resume as PDF</a:t>
+              <a:t>  PDF preview of uploaded resume in-browser   •   Session state cleared automatically on new resume upload</a:t>
             </a:r>
           </a:p>
           <a:p>
@@ -9984,22 +9941,7 @@
                   <a:srgbClr val="FFFFFF"/>
                 </a:solidFill>
               </a:rPr>
-              <a:t>  Job selector dropdown — switch analysis between any of the top 10 matches instantly</a:t>
-            </a:r>
-          </a:p>
-          <a:p>
-            <a:pPr>
-              <a:spcBef>
-                <a:spcPts val="600"/>
-              </a:spcBef>
-            </a:pPr>
-            <a:r>
-              <a:rPr sz="1400">
-                <a:solidFill>
-                  <a:srgbClr val="FFFFFF"/>
-                </a:solidFill>
-              </a:rPr>
-              <a:t>  Email button — opens mail client with pre-composed results email to the candidate</a:t>
+              <a:t>  Apply improvements &amp; download updated resume as a styled PDF (name, headers, bullets formatted)</a:t>
             </a:r>
           </a:p>
         </p:txBody>
@@ -10213,7 +10155,7 @@
                   <a:srgbClr val="F9E2AF"/>
                 </a:solidFill>
               </a:rPr>
-              <a:t>Binary Classification  (threshold = 40%)</a:t>
+              <a:t>Binary Classification  —  205 held-out test examples, threshold = 40%</a:t>
             </a:r>
           </a:p>
         </p:txBody>
@@ -10290,7 +10232,7 @@
                   <a:srgbClr val="A6E3A1"/>
                 </a:solidFill>
               </a:rPr>
-              <a:t>0.89</a:t>
+              <a:t>0.90</a:t>
             </a:r>
           </a:p>
         </p:txBody>
@@ -10512,7 +10454,7 @@
                   <a:srgbClr val="A6E3A1"/>
                 </a:solidFill>
               </a:rPr>
-              <a:t>0.99</a:t>
+              <a:t>0.86</a:t>
             </a:r>
           </a:p>
         </p:txBody>
@@ -10547,7 +10489,7 @@
                 </a:solidFill>
               </a:rPr>
               <a:t>Precision
-(non-match)</a:t>
+(match)</a:t>
             </a:r>
           </a:p>
         </p:txBody>
@@ -10624,7 +10566,7 @@
                   <a:srgbClr val="A6E3A1"/>
                 </a:solidFill>
               </a:rPr>
-              <a:t>0.70</a:t>
+              <a:t>0.99</a:t>
             </a:r>
           </a:p>
         </p:txBody>
@@ -10659,7 +10601,7 @@
                 </a:solidFill>
               </a:rPr>
               <a:t>Recall
-(non-match)</a:t>
+(match)</a:t>
             </a:r>
           </a:p>
         </p:txBody>
@@ -10776,7 +10718,7 @@
                   <a:srgbClr val="FFFFFF"/>
                 </a:solidFill>
               </a:rPr>
-              <a:t>  Scores for correct resumes: 77.88% / 89.63% / 91.64%  vs  distractors below 47%</a:t>
+              <a:t>  Scores for correct resumes: 80.35% / 88.69% / 93.03%  vs  distractors all below 44%</a:t>
             </a:r>
           </a:p>
         </p:txBody>
@@ -10853,7 +10795,7 @@
                   <a:srgbClr val="CCCCCC"/>
                 </a:solidFill>
               </a:rPr>
-              <a:t>Note: recall for non-matches is 0.70 — model is slightly biased toward predicting 'match'. Expected given label imbalance (644 matches vs 377 non-matches).</a:t>
+              <a:t>99% recall on matches — model almost never misses a genuine fit. Slight false-positive bias is acceptable for a career tool (better to show more options than miss the right job).</a:t>
             </a:r>
           </a:p>
         </p:txBody>
